--- a/backend/Team-11.pptx
+++ b/backend/Team-11.pptx
@@ -53,7 +53,7 @@
       </p:grpSpPr>
       <p:sp>
         <p:nvSpPr>
-          <p:cNvPr id="320" name="PlaceHolder 1"/>
+          <p:cNvPr id="322" name="PlaceHolder 1"/>
           <p:cNvSpPr>
             <a:spLocks noGrp="1"/>
           </p:cNvSpPr>
@@ -104,7 +104,7 @@
       </p:sp>
       <p:sp>
         <p:nvSpPr>
-          <p:cNvPr id="321" name="PlaceHolder 2"/>
+          <p:cNvPr id="323" name="PlaceHolder 2"/>
           <p:cNvSpPr>
             <a:spLocks noGrp="1"/>
           </p:cNvSpPr>
@@ -157,7 +157,7 @@
       </p:sp>
       <p:sp>
         <p:nvSpPr>
-          <p:cNvPr id="322" name="PlaceHolder 3"/>
+          <p:cNvPr id="324" name="PlaceHolder 3"/>
           <p:cNvSpPr>
             <a:spLocks noGrp="1"/>
           </p:cNvSpPr>
@@ -195,7 +195,7 @@
                 <a:uFillTx/>
                 <a:latin typeface="Times New Roman"/>
               </a:rPr>
-              <a:t>&lt;header&gt;</a:t>
+              <a:t> </a:t>
             </a:r>
             <a:endParaRPr lang="en-US" sz="1400" b="0" u="none" strike="noStrike">
               <a:solidFill>
@@ -210,7 +210,7 @@
       </p:sp>
       <p:sp>
         <p:nvSpPr>
-          <p:cNvPr id="323" name="PlaceHolder 4"/>
+          <p:cNvPr id="325" name="PlaceHolder 4"/>
           <p:cNvSpPr>
             <a:spLocks noGrp="1"/>
           </p:cNvSpPr>
@@ -261,7 +261,7 @@
                 <a:uFillTx/>
                 <a:latin typeface="Times New Roman"/>
               </a:rPr>
-              <a:t>&lt;date/time&gt;</a:t>
+              <a:t> </a:t>
             </a:r>
             <a:endParaRPr lang="en-US" sz="1400" b="0" u="none" strike="noStrike">
               <a:solidFill>
@@ -276,7 +276,7 @@
       </p:sp>
       <p:sp>
         <p:nvSpPr>
-          <p:cNvPr id="324" name="PlaceHolder 5"/>
+          <p:cNvPr id="326" name="PlaceHolder 5"/>
           <p:cNvSpPr>
             <a:spLocks noGrp="1"/>
           </p:cNvSpPr>
@@ -327,7 +327,7 @@
                 <a:uFillTx/>
                 <a:latin typeface="Times New Roman"/>
               </a:rPr>
-              <a:t>&lt;footer&gt;</a:t>
+              <a:t> </a:t>
             </a:r>
             <a:endParaRPr lang="en-US" sz="1400" b="0" u="none" strike="noStrike">
               <a:solidFill>
@@ -342,7 +342,7 @@
       </p:sp>
       <p:sp>
         <p:nvSpPr>
-          <p:cNvPr id="325" name="PlaceHolder 6"/>
+          <p:cNvPr id="327" name="PlaceHolder 6"/>
           <p:cNvSpPr>
             <a:spLocks noGrp="1"/>
           </p:cNvSpPr>
@@ -384,7 +384,7 @@
             <a:pPr indent="0" algn="r">
               <a:buNone/>
             </a:pPr>
-            <a:fld id="{17AB1EFF-1EFB-4544-8659-44E90D1486D0}" type="slidenum">
+            <a:fld id="{AEEC1DD9-32E8-48D4-9EF0-7F75E4291DF8}" type="slidenum">
               <a:rPr lang="en-US" sz="1400" b="0" u="none" strike="noStrike">
                 <a:solidFill>
                   <a:srgbClr val="000000"/>
@@ -393,7 +393,7 @@
                 <a:uFillTx/>
                 <a:latin typeface="Times New Roman"/>
               </a:rPr>
-              <a:t>&lt;number&gt;</a:t>
+              <a:t>1</a:t>
             </a:fld>
             <a:endParaRPr lang="en-US" sz="1400" b="0" u="none" strike="noStrike">
               <a:solidFill>
@@ -431,7 +431,7 @@
       </p:grpSpPr>
       <p:sp>
         <p:nvSpPr>
-          <p:cNvPr id="381" name="PlaceHolder 1"/>
+          <p:cNvPr id="383" name="PlaceHolder 1"/>
           <p:cNvSpPr>
             <a:spLocks noGrp="1"/>
           </p:cNvSpPr>
@@ -454,7 +454,7 @@
       </p:sp>
       <p:sp>
         <p:nvSpPr>
-          <p:cNvPr id="382" name="PlaceHolder 2"/>
+          <p:cNvPr id="384" name="PlaceHolder 2"/>
           <p:cNvSpPr>
             <a:spLocks noGrp="1"/>
           </p:cNvSpPr>
@@ -496,7 +496,7 @@
       </p:sp>
       <p:sp>
         <p:nvSpPr>
-          <p:cNvPr id="383" name="PlaceHolder 3"/>
+          <p:cNvPr id="385" name="PlaceHolder 3"/>
           <p:cNvSpPr>
             <a:spLocks noGrp="1"/>
           </p:cNvSpPr>
@@ -551,7 +551,7 @@
                 <a:tab pos="0" algn="l"/>
               </a:tabLst>
             </a:pPr>
-            <a:fld id="{B3C8E956-7861-44F9-83C7-AD1B70FE83BD}" type="slidenum">
+            <a:fld id="{45C32EEB-99FB-4D2A-BCAC-C6131A5274A4}" type="slidenum">
               <a:rPr lang="en-US" sz="1200" b="0" u="none" strike="noStrike">
                 <a:solidFill>
                   <a:schemeClr val="dk1"/>
@@ -714,7 +714,7 @@
         <p:txBody>
           <a:bodyPr/>
           <a:p>
-            <a:fld id="{4E87D5F0-E20E-4540-9488-90B7C635BB28}" type="slidenum">
+            <a:fld id="{3BF88CB6-D14E-4213-AFDC-519166A9D05C}" type="slidenum">
               <a:t>&lt;#&gt;</a:t>
             </a:fld>
           </a:p>
@@ -2195,7 +2195,7 @@
                 <a:tab pos="0" algn="l"/>
               </a:tabLst>
             </a:pPr>
-            <a:fld id="{D4AE4F82-BDF3-4D12-9DD7-F2F9D4E28771}" type="slidenum">
+            <a:fld id="{DE1FA01B-BCB0-4646-B66E-05165C5C9444}" type="slidenum">
               <a:rPr lang="en-IN" sz="900" b="0" u="none" strike="noStrike">
                 <a:solidFill>
                   <a:schemeClr val="accent1"/>
@@ -3391,7 +3391,7 @@
                 <a:tab pos="0" algn="l"/>
               </a:tabLst>
             </a:pPr>
-            <a:fld id="{73A829F2-DC2B-4318-9B6E-A0783DB271AD}" type="slidenum">
+            <a:fld id="{9DDE070C-A06B-4530-B410-AF7C54D63687}" type="slidenum">
               <a:rPr lang="en-IN" sz="900" b="0" u="none" strike="noStrike">
                 <a:solidFill>
                   <a:schemeClr val="accent1"/>
@@ -4506,7 +4506,7 @@
                 <a:tab pos="0" algn="l"/>
               </a:tabLst>
             </a:pPr>
-            <a:fld id="{B414A8D6-5893-4F21-98E0-0C944A916C94}" type="slidenum">
+            <a:fld id="{951F657C-1999-4521-BFC3-F7A1C68C8A60}" type="slidenum">
               <a:rPr lang="en-IN" sz="900" b="0" u="none" strike="noStrike">
                 <a:solidFill>
                   <a:schemeClr val="accent1"/>
@@ -5714,7 +5714,7 @@
                 <a:tab pos="0" algn="l"/>
               </a:tabLst>
             </a:pPr>
-            <a:fld id="{53B046DE-D6F1-4AEA-893C-65F2F432C871}" type="slidenum">
+            <a:fld id="{2A5A9215-453B-4525-958D-7C42A593C120}" type="slidenum">
               <a:rPr lang="en-IN" sz="900" b="0" u="none" strike="noStrike">
                 <a:solidFill>
                   <a:schemeClr val="accent1"/>
@@ -6949,7 +6949,7 @@
                 <a:tab pos="0" algn="l"/>
               </a:tabLst>
             </a:pPr>
-            <a:fld id="{3E41FE90-B190-4E08-B44D-72E3A1771B78}" type="slidenum">
+            <a:fld id="{AC973609-E371-4AD2-934F-92590EB357E9}" type="slidenum">
               <a:rPr lang="en-IN" sz="900" b="0" u="none" strike="noStrike">
                 <a:solidFill>
                   <a:schemeClr val="accent1"/>
@@ -8332,7 +8332,7 @@
                 <a:tab pos="0" algn="l"/>
               </a:tabLst>
             </a:pPr>
-            <a:fld id="{AEF4DBF1-B80D-468A-8694-87C88A6FF78F}" type="slidenum">
+            <a:fld id="{E4374FB9-9114-4F24-A98E-71B16E05A4F7}" type="slidenum">
               <a:rPr lang="en-IN" sz="900" b="0" u="none" strike="noStrike">
                 <a:solidFill>
                   <a:schemeClr val="accent1"/>
@@ -9276,7 +9276,7 @@
                 <a:tab pos="0" algn="l"/>
               </a:tabLst>
             </a:pPr>
-            <a:fld id="{93B0A73C-CBFA-4B05-BBFE-072F29E72CD9}" type="slidenum">
+            <a:fld id="{E593A026-8340-4171-90DC-9B61F65E8164}" type="slidenum">
               <a:rPr lang="en-IN" sz="900" b="0" u="none" strike="noStrike">
                 <a:solidFill>
                   <a:schemeClr val="accent1"/>
@@ -10009,7 +10009,7 @@
         <p:txBody>
           <a:bodyPr/>
           <a:p>
-            <a:fld id="{3918E79C-DBE3-4C8A-AFE1-7CC8B0B42854}" type="slidenum">
+            <a:fld id="{C7691D9B-A237-4DDB-BF13-5DDD3AB255F9}" type="slidenum">
               <a:t>&lt;#&gt;</a:t>
             </a:fld>
           </a:p>
@@ -10042,7 +10042,7 @@
 </file>
 
 <file path=ppt/slideLayouts/slideLayout18.xml><?xml version="1.0" encoding="utf-8"?>
-<p:sldLayout xmlns:a="http://schemas.openxmlformats.org/drawingml/2006/main" xmlns:p="http://schemas.openxmlformats.org/presentationml/2006/main" xmlns:r="http://schemas.openxmlformats.org/officeDocument/2006/relationships" xmlns:p14="http://schemas.microsoft.com/office/powerpoint/2010/main" xmlns:p15="http://schemas.microsoft.com/office/powerpoint/2012/main" xmlns:mc="http://schemas.openxmlformats.org/markup-compatibility/2006" type="title" preserve="1">
+<p:sldLayout xmlns:a="http://schemas.openxmlformats.org/drawingml/2006/main" xmlns:p="http://schemas.openxmlformats.org/presentationml/2006/main" xmlns:r="http://schemas.openxmlformats.org/officeDocument/2006/relationships" xmlns:p14="http://schemas.microsoft.com/office/powerpoint/2010/main" xmlns:p15="http://schemas.microsoft.com/office/powerpoint/2012/main" xmlns:mc="http://schemas.openxmlformats.org/markup-compatibility/2006" type="tx" preserve="1">
   <p:cSld name="Default 1">
     <p:spTree>
       <p:nvGrpSpPr>
@@ -10103,173 +10103,6 @@
       <p:sp>
         <p:nvSpPr>
           <p:cNvPr id="317" name="PlaceHolder 2"/>
-          <p:cNvSpPr>
-            <a:spLocks noGrp="1"/>
-          </p:cNvSpPr>
-          <p:nvPr>
-            <p:ph type="subTitle"/>
-          </p:nvPr>
-        </p:nvSpPr>
-        <p:spPr>
-          <a:xfrm>
-            <a:off x="677160" y="2160720"/>
-            <a:ext cx="8595720" cy="3879720"/>
-          </a:xfrm>
-          <a:prstGeom prst="rect">
-            <a:avLst/>
-          </a:prstGeom>
-          <a:noFill/>
-          <a:ln w="0">
-            <a:noFill/>
-          </a:ln>
-        </p:spPr>
-        <p:txBody>
-          <a:bodyPr lIns="0" tIns="0" rIns="0" bIns="0" anchor="ctr">
-            <a:spAutoFit/>
-          </a:bodyPr>
-          <a:p>
-            <a:pPr indent="0" algn="ctr">
-              <a:buNone/>
-            </a:pPr>
-            <a:endParaRPr lang="en-US" sz="3200" b="0" u="none" strike="noStrike">
-              <a:solidFill>
-                <a:srgbClr val="000000"/>
-              </a:solidFill>
-              <a:effectLst/>
-              <a:uFillTx/>
-              <a:latin typeface="Arial"/>
-            </a:endParaRPr>
-          </a:p>
-        </p:txBody>
-      </p:sp>
-      <p:sp>
-        <p:nvSpPr>
-          <p:cNvPr id="4" name="PlaceHolder 3"/>
-          <p:cNvSpPr>
-            <a:spLocks noGrp="1"/>
-          </p:cNvSpPr>
-          <p:nvPr>
-            <p:ph type="ftr" idx="52"/>
-          </p:nvPr>
-        </p:nvSpPr>
-        <p:spPr/>
-        <p:txBody>
-          <a:bodyPr/>
-          <a:p>
-            <a:r>
-              <a:t>Footer</a:t>
-            </a:r>
-          </a:p>
-        </p:txBody>
-      </p:sp>
-      <p:sp>
-        <p:nvSpPr>
-          <p:cNvPr id="5" name="PlaceHolder 4"/>
-          <p:cNvSpPr>
-            <a:spLocks noGrp="1"/>
-          </p:cNvSpPr>
-          <p:nvPr>
-            <p:ph type="sldNum" idx="53"/>
-          </p:nvPr>
-        </p:nvSpPr>
-        <p:spPr/>
-        <p:txBody>
-          <a:bodyPr/>
-          <a:p>
-            <a:fld id="{448178E6-A323-4894-BC83-94F513A8A051}" type="slidenum">
-              <a:t>&lt;#&gt;</a:t>
-            </a:fld>
-          </a:p>
-        </p:txBody>
-      </p:sp>
-      <p:sp>
-        <p:nvSpPr>
-          <p:cNvPr id="6" name="PlaceHolder 5"/>
-          <p:cNvSpPr>
-            <a:spLocks noGrp="1"/>
-          </p:cNvSpPr>
-          <p:nvPr>
-            <p:ph type="dt" idx="54"/>
-          </p:nvPr>
-        </p:nvSpPr>
-        <p:spPr/>
-        <p:txBody>
-          <a:bodyPr/>
-          <a:p>
-            <a:r>
-              <a:rPr lang="en-US"/>
-              <a:t/>
-            </a:r>
-          </a:p>
-        </p:txBody>
-      </p:sp>
-    </p:spTree>
-  </p:cSld>
-</p:sldLayout>
-</file>
-
-<file path=ppt/slideLayouts/slideLayout19.xml><?xml version="1.0" encoding="utf-8"?>
-<p:sldLayout xmlns:a="http://schemas.openxmlformats.org/drawingml/2006/main" xmlns:p="http://schemas.openxmlformats.org/presentationml/2006/main" xmlns:r="http://schemas.openxmlformats.org/officeDocument/2006/relationships" xmlns:p14="http://schemas.microsoft.com/office/powerpoint/2010/main" xmlns:p15="http://schemas.microsoft.com/office/powerpoint/2012/main" xmlns:mc="http://schemas.openxmlformats.org/markup-compatibility/2006" type="obj" preserve="1">
-  <p:cSld name="Default 1">
-    <p:spTree>
-      <p:nvGrpSpPr>
-        <p:cNvPr id="1" name=""/>
-        <p:cNvGrpSpPr/>
-        <p:nvPr/>
-      </p:nvGrpSpPr>
-      <p:grpSpPr>
-        <a:xfrm>
-          <a:off x="0" y="0"/>
-          <a:ext cx="0" cy="0"/>
-          <a:chOff x="0" y="0"/>
-          <a:chExt cx="0" cy="0"/>
-        </a:xfrm>
-      </p:grpSpPr>
-      <p:sp>
-        <p:nvSpPr>
-          <p:cNvPr id="318" name="PlaceHolder 1"/>
-          <p:cNvSpPr>
-            <a:spLocks noGrp="1"/>
-          </p:cNvSpPr>
-          <p:nvPr>
-            <p:ph type="title"/>
-          </p:nvPr>
-        </p:nvSpPr>
-        <p:spPr>
-          <a:xfrm>
-            <a:off x="677160" y="956520"/>
-            <a:ext cx="8595720" cy="625320"/>
-          </a:xfrm>
-          <a:prstGeom prst="rect">
-            <a:avLst/>
-          </a:prstGeom>
-          <a:noFill/>
-          <a:ln w="0">
-            <a:noFill/>
-          </a:ln>
-        </p:spPr>
-        <p:txBody>
-          <a:bodyPr lIns="0" tIns="0" rIns="0" bIns="0" anchor="ctr">
-            <a:spAutoFit/>
-          </a:bodyPr>
-          <a:p>
-            <a:pPr indent="0" algn="ctr">
-              <a:buNone/>
-            </a:pPr>
-            <a:endParaRPr lang="en-US" sz="4400" b="0" u="none" strike="noStrike">
-              <a:solidFill>
-                <a:srgbClr val="000000"/>
-              </a:solidFill>
-              <a:effectLst/>
-              <a:uFillTx/>
-              <a:latin typeface="Arial"/>
-            </a:endParaRPr>
-          </a:p>
-        </p:txBody>
-      </p:sp>
-      <p:sp>
-        <p:nvSpPr>
-          <p:cNvPr id="319" name="PlaceHolder 2"/>
           <p:cNvSpPr>
             <a:spLocks noGrp="1"/>
           </p:cNvSpPr>
@@ -10346,7 +10179,174 @@
         <p:txBody>
           <a:bodyPr/>
           <a:p>
-            <a:fld id="{33F9467C-0011-4E23-A08D-38D9C66928FF}" type="slidenum">
+            <a:fld id="{2A011146-24B4-4BC7-95BD-BA1893099F5B}" type="slidenum">
+              <a:t>&lt;#&gt;</a:t>
+            </a:fld>
+          </a:p>
+        </p:txBody>
+      </p:sp>
+      <p:sp>
+        <p:nvSpPr>
+          <p:cNvPr id="6" name="PlaceHolder 5"/>
+          <p:cNvSpPr>
+            <a:spLocks noGrp="1"/>
+          </p:cNvSpPr>
+          <p:nvPr>
+            <p:ph type="dt" idx="54"/>
+          </p:nvPr>
+        </p:nvSpPr>
+        <p:spPr/>
+        <p:txBody>
+          <a:bodyPr/>
+          <a:p>
+            <a:r>
+              <a:rPr lang="en-US"/>
+              <a:t/>
+            </a:r>
+          </a:p>
+        </p:txBody>
+      </p:sp>
+    </p:spTree>
+  </p:cSld>
+</p:sldLayout>
+</file>
+
+<file path=ppt/slideLayouts/slideLayout19.xml><?xml version="1.0" encoding="utf-8"?>
+<p:sldLayout xmlns:a="http://schemas.openxmlformats.org/drawingml/2006/main" xmlns:p="http://schemas.openxmlformats.org/presentationml/2006/main" xmlns:r="http://schemas.openxmlformats.org/officeDocument/2006/relationships" xmlns:p14="http://schemas.microsoft.com/office/powerpoint/2010/main" xmlns:p15="http://schemas.microsoft.com/office/powerpoint/2012/main" xmlns:mc="http://schemas.openxmlformats.org/markup-compatibility/2006" type="title" preserve="1">
+  <p:cSld name="Default 1">
+    <p:spTree>
+      <p:nvGrpSpPr>
+        <p:cNvPr id="1" name=""/>
+        <p:cNvGrpSpPr/>
+        <p:nvPr/>
+      </p:nvGrpSpPr>
+      <p:grpSpPr>
+        <a:xfrm>
+          <a:off x="0" y="0"/>
+          <a:ext cx="0" cy="0"/>
+          <a:chOff x="0" y="0"/>
+          <a:chExt cx="0" cy="0"/>
+        </a:xfrm>
+      </p:grpSpPr>
+      <p:sp>
+        <p:nvSpPr>
+          <p:cNvPr id="318" name="PlaceHolder 1"/>
+          <p:cNvSpPr>
+            <a:spLocks noGrp="1"/>
+          </p:cNvSpPr>
+          <p:nvPr>
+            <p:ph type="title"/>
+          </p:nvPr>
+        </p:nvSpPr>
+        <p:spPr>
+          <a:xfrm>
+            <a:off x="677160" y="956520"/>
+            <a:ext cx="8595720" cy="625320"/>
+          </a:xfrm>
+          <a:prstGeom prst="rect">
+            <a:avLst/>
+          </a:prstGeom>
+          <a:noFill/>
+          <a:ln w="0">
+            <a:noFill/>
+          </a:ln>
+        </p:spPr>
+        <p:txBody>
+          <a:bodyPr lIns="0" tIns="0" rIns="0" bIns="0" anchor="ctr">
+            <a:spAutoFit/>
+          </a:bodyPr>
+          <a:p>
+            <a:pPr indent="0" algn="ctr">
+              <a:buNone/>
+            </a:pPr>
+            <a:endParaRPr lang="en-US" sz="4400" b="0" u="none" strike="noStrike">
+              <a:solidFill>
+                <a:srgbClr val="000000"/>
+              </a:solidFill>
+              <a:effectLst/>
+              <a:uFillTx/>
+              <a:latin typeface="Arial"/>
+            </a:endParaRPr>
+          </a:p>
+        </p:txBody>
+      </p:sp>
+      <p:sp>
+        <p:nvSpPr>
+          <p:cNvPr id="319" name="PlaceHolder 2"/>
+          <p:cNvSpPr>
+            <a:spLocks noGrp="1"/>
+          </p:cNvSpPr>
+          <p:nvPr>
+            <p:ph type="subTitle"/>
+          </p:nvPr>
+        </p:nvSpPr>
+        <p:spPr>
+          <a:xfrm>
+            <a:off x="677160" y="2160720"/>
+            <a:ext cx="8595720" cy="3879720"/>
+          </a:xfrm>
+          <a:prstGeom prst="rect">
+            <a:avLst/>
+          </a:prstGeom>
+          <a:noFill/>
+          <a:ln w="0">
+            <a:noFill/>
+          </a:ln>
+        </p:spPr>
+        <p:txBody>
+          <a:bodyPr lIns="0" tIns="0" rIns="0" bIns="0" anchor="ctr">
+            <a:spAutoFit/>
+          </a:bodyPr>
+          <a:p>
+            <a:pPr indent="0" algn="ctr">
+              <a:buNone/>
+            </a:pPr>
+            <a:endParaRPr lang="en-US" sz="3200" b="0" u="none" strike="noStrike">
+              <a:solidFill>
+                <a:srgbClr val="000000"/>
+              </a:solidFill>
+              <a:effectLst/>
+              <a:uFillTx/>
+              <a:latin typeface="Arial"/>
+            </a:endParaRPr>
+          </a:p>
+        </p:txBody>
+      </p:sp>
+      <p:sp>
+        <p:nvSpPr>
+          <p:cNvPr id="4" name="PlaceHolder 3"/>
+          <p:cNvSpPr>
+            <a:spLocks noGrp="1"/>
+          </p:cNvSpPr>
+          <p:nvPr>
+            <p:ph type="ftr" idx="52"/>
+          </p:nvPr>
+        </p:nvSpPr>
+        <p:spPr/>
+        <p:txBody>
+          <a:bodyPr/>
+          <a:p>
+            <a:r>
+              <a:t>Footer</a:t>
+            </a:r>
+          </a:p>
+        </p:txBody>
+      </p:sp>
+      <p:sp>
+        <p:nvSpPr>
+          <p:cNvPr id="5" name="PlaceHolder 4"/>
+          <p:cNvSpPr>
+            <a:spLocks noGrp="1"/>
+          </p:cNvSpPr>
+          <p:nvPr>
+            <p:ph type="sldNum" idx="53"/>
+          </p:nvPr>
+        </p:nvSpPr>
+        <p:spPr/>
+        <p:txBody>
+          <a:bodyPr/>
+          <a:p>
+            <a:fld id="{9203091E-E8C6-4EC3-A8E2-45E277505745}" type="slidenum">
               <a:t>&lt;#&gt;</a:t>
             </a:fld>
           </a:p>
@@ -11559,7 +11559,7 @@
                 <a:tab pos="0" algn="l"/>
               </a:tabLst>
             </a:pPr>
-            <a:fld id="{B4AC1A6B-94CB-4845-A2BE-F4D560CD95E4}" type="slidenum">
+            <a:fld id="{C2D9F180-4AD1-410B-829F-94D4F892D163}" type="slidenum">
               <a:rPr lang="en-IN" sz="900" b="0" u="none" strike="noStrike">
                 <a:solidFill>
                   <a:schemeClr val="accent1"/>
@@ -11698,6 +11698,176 @@
               <a:uFillTx/>
               <a:latin typeface="Arial"/>
             </a:endParaRPr>
+          </a:p>
+        </p:txBody>
+      </p:sp>
+    </p:spTree>
+  </p:cSld>
+</p:sldLayout>
+</file>
+
+<file path=ppt/slideLayouts/slideLayout20.xml><?xml version="1.0" encoding="utf-8"?>
+<p:sldLayout xmlns:a="http://schemas.openxmlformats.org/drawingml/2006/main" xmlns:p="http://schemas.openxmlformats.org/presentationml/2006/main" xmlns:r="http://schemas.openxmlformats.org/officeDocument/2006/relationships" xmlns:p14="http://schemas.microsoft.com/office/powerpoint/2010/main" xmlns:p15="http://schemas.microsoft.com/office/powerpoint/2012/main" xmlns:mc="http://schemas.openxmlformats.org/markup-compatibility/2006" type="obj" preserve="1">
+  <p:cSld name="Default 1">
+    <p:spTree>
+      <p:nvGrpSpPr>
+        <p:cNvPr id="1" name=""/>
+        <p:cNvGrpSpPr/>
+        <p:nvPr/>
+      </p:nvGrpSpPr>
+      <p:grpSpPr>
+        <a:xfrm>
+          <a:off x="0" y="0"/>
+          <a:ext cx="0" cy="0"/>
+          <a:chOff x="0" y="0"/>
+          <a:chExt cx="0" cy="0"/>
+        </a:xfrm>
+      </p:grpSpPr>
+      <p:sp>
+        <p:nvSpPr>
+          <p:cNvPr id="320" name="PlaceHolder 1"/>
+          <p:cNvSpPr>
+            <a:spLocks noGrp="1"/>
+          </p:cNvSpPr>
+          <p:nvPr>
+            <p:ph type="title"/>
+          </p:nvPr>
+        </p:nvSpPr>
+        <p:spPr>
+          <a:xfrm>
+            <a:off x="677160" y="956520"/>
+            <a:ext cx="8595720" cy="625320"/>
+          </a:xfrm>
+          <a:prstGeom prst="rect">
+            <a:avLst/>
+          </a:prstGeom>
+          <a:noFill/>
+          <a:ln w="0">
+            <a:noFill/>
+          </a:ln>
+        </p:spPr>
+        <p:txBody>
+          <a:bodyPr lIns="0" tIns="0" rIns="0" bIns="0" anchor="ctr">
+            <a:spAutoFit/>
+          </a:bodyPr>
+          <a:p>
+            <a:pPr indent="0" algn="ctr">
+              <a:buNone/>
+            </a:pPr>
+            <a:endParaRPr lang="en-US" sz="4400" b="0" u="none" strike="noStrike">
+              <a:solidFill>
+                <a:srgbClr val="000000"/>
+              </a:solidFill>
+              <a:effectLst/>
+              <a:uFillTx/>
+              <a:latin typeface="Arial"/>
+            </a:endParaRPr>
+          </a:p>
+        </p:txBody>
+      </p:sp>
+      <p:sp>
+        <p:nvSpPr>
+          <p:cNvPr id="321" name="PlaceHolder 2"/>
+          <p:cNvSpPr>
+            <a:spLocks noGrp="1"/>
+          </p:cNvSpPr>
+          <p:nvPr>
+            <p:ph/>
+          </p:nvPr>
+        </p:nvSpPr>
+        <p:spPr>
+          <a:xfrm>
+            <a:off x="677160" y="2160720"/>
+            <a:ext cx="8595720" cy="3879720"/>
+          </a:xfrm>
+          <a:prstGeom prst="rect">
+            <a:avLst/>
+          </a:prstGeom>
+          <a:noFill/>
+          <a:ln w="0">
+            <a:noFill/>
+          </a:ln>
+        </p:spPr>
+        <p:txBody>
+          <a:bodyPr lIns="0" tIns="0" rIns="0" bIns="0" anchor="t">
+            <a:normAutofit/>
+          </a:bodyPr>
+          <a:p>
+            <a:pPr indent="0" algn="l">
+              <a:spcBef>
+                <a:spcPts val="1417"/>
+              </a:spcBef>
+              <a:buNone/>
+            </a:pPr>
+            <a:endParaRPr lang="en-US" sz="3200" b="0" u="none" strike="noStrike">
+              <a:solidFill>
+                <a:srgbClr val="000000"/>
+              </a:solidFill>
+              <a:effectLst/>
+              <a:uFillTx/>
+              <a:latin typeface="Arial"/>
+            </a:endParaRPr>
+          </a:p>
+        </p:txBody>
+      </p:sp>
+      <p:sp>
+        <p:nvSpPr>
+          <p:cNvPr id="4" name="PlaceHolder 3"/>
+          <p:cNvSpPr>
+            <a:spLocks noGrp="1"/>
+          </p:cNvSpPr>
+          <p:nvPr>
+            <p:ph type="ftr" idx="52"/>
+          </p:nvPr>
+        </p:nvSpPr>
+        <p:spPr/>
+        <p:txBody>
+          <a:bodyPr/>
+          <a:p>
+            <a:r>
+              <a:t>Footer</a:t>
+            </a:r>
+          </a:p>
+        </p:txBody>
+      </p:sp>
+      <p:sp>
+        <p:nvSpPr>
+          <p:cNvPr id="5" name="PlaceHolder 4"/>
+          <p:cNvSpPr>
+            <a:spLocks noGrp="1"/>
+          </p:cNvSpPr>
+          <p:nvPr>
+            <p:ph type="sldNum" idx="53"/>
+          </p:nvPr>
+        </p:nvSpPr>
+        <p:spPr/>
+        <p:txBody>
+          <a:bodyPr/>
+          <a:p>
+            <a:fld id="{9C3312CA-14DE-4284-9A5D-5EAD65D74642}" type="slidenum">
+              <a:t>&lt;#&gt;</a:t>
+            </a:fld>
+          </a:p>
+        </p:txBody>
+      </p:sp>
+      <p:sp>
+        <p:nvSpPr>
+          <p:cNvPr id="6" name="PlaceHolder 5"/>
+          <p:cNvSpPr>
+            <a:spLocks noGrp="1"/>
+          </p:cNvSpPr>
+          <p:nvPr>
+            <p:ph type="dt" idx="54"/>
+          </p:nvPr>
+        </p:nvSpPr>
+        <p:spPr/>
+        <p:txBody>
+          <a:bodyPr/>
+          <a:p>
+            <a:r>
+              <a:rPr lang="en-US"/>
+              <a:t/>
+            </a:r>
           </a:p>
         </p:txBody>
       </p:sp>
@@ -12881,7 +13051,7 @@
                 <a:tab pos="0" algn="l"/>
               </a:tabLst>
             </a:pPr>
-            <a:fld id="{5D1C0AEC-134C-44F8-8CA4-98150A4D446F}" type="slidenum">
+            <a:fld id="{EAE5FE24-375A-4474-9CDA-975F01A37051}" type="slidenum">
               <a:rPr lang="en-IN" sz="900" b="0" u="none" strike="noStrike">
                 <a:solidFill>
                   <a:schemeClr val="accent1"/>
@@ -14264,7 +14434,7 @@
                 <a:tab pos="0" algn="l"/>
               </a:tabLst>
             </a:pPr>
-            <a:fld id="{255561B0-1CDD-4660-967E-CA841F8AF0E7}" type="slidenum">
+            <a:fld id="{E690EA19-F70F-4446-A9BE-353891837654}" type="slidenum">
               <a:rPr lang="en-IN" sz="900" b="0" u="none" strike="noStrike">
                 <a:solidFill>
                   <a:schemeClr val="accent1"/>
@@ -15647,7 +15817,7 @@
                 <a:tab pos="0" algn="l"/>
               </a:tabLst>
             </a:pPr>
-            <a:fld id="{7F438DEE-4D74-4254-B96D-1A5D7A15B7F6}" type="slidenum">
+            <a:fld id="{0854E28A-3AAC-4A46-8380-B567493F49E5}" type="slidenum">
               <a:rPr lang="en-IN" sz="900" b="0" u="none" strike="noStrike">
                 <a:solidFill>
                   <a:schemeClr val="accent1"/>
@@ -16762,7 +16932,7 @@
                 <a:tab pos="0" algn="l"/>
               </a:tabLst>
             </a:pPr>
-            <a:fld id="{A488F170-A9EC-409C-8EDA-83AAB0D8FA2C}" type="slidenum">
+            <a:fld id="{F89B5B5E-1B54-4155-ACC9-49F18BB54799}" type="slidenum">
               <a:rPr lang="en-IN" sz="900" b="0" u="none" strike="noStrike">
                 <a:solidFill>
                   <a:schemeClr val="accent1"/>
@@ -18506,7 +18676,7 @@
                 <a:tab pos="0" algn="l"/>
               </a:tabLst>
             </a:pPr>
-            <a:fld id="{AFB7F21B-AE2E-4B75-B9D1-C345A8A905D0}" type="slidenum">
+            <a:fld id="{7EED0506-B670-4AE0-9357-6127C093815B}" type="slidenum">
               <a:rPr lang="en-IN" sz="900" b="0" u="none" strike="noStrike">
                 <a:solidFill>
                   <a:schemeClr val="accent1"/>
@@ -20496,7 +20666,7 @@
                 <a:tab pos="0" algn="l"/>
               </a:tabLst>
             </a:pPr>
-            <a:fld id="{9E60BE41-1BE7-4120-82D7-CCB201B67860}" type="slidenum">
+            <a:fld id="{237FC9B2-ADC9-4A33-B958-5F99949C10F0}" type="slidenum">
               <a:rPr lang="en-IN" sz="900" b="0" u="none" strike="noStrike">
                 <a:solidFill>
                   <a:schemeClr val="accent1"/>
@@ -21518,7 +21688,7 @@
                 <a:tab pos="0" algn="l"/>
               </a:tabLst>
             </a:pPr>
-            <a:fld id="{A58CFE84-8387-4A4C-9A85-1B9A4AA24209}" type="slidenum">
+            <a:fld id="{294EF835-A264-4735-A0F2-4351782B03D3}" type="slidenum">
               <a:rPr lang="en-IN" sz="900" b="0" u="none" strike="noStrike">
                 <a:solidFill>
                   <a:schemeClr val="accent1"/>
@@ -23054,7 +23224,7 @@
                 <a:uFillTx/>
                 <a:latin typeface="Times New Roman"/>
               </a:rPr>
-              <a:t> </a:t>
+              <a:t>&lt;footer&gt;</a:t>
             </a:r>
             <a:endParaRPr lang="en-US" sz="1400" b="0" u="none" strike="noStrike">
               <a:solidFill>
@@ -23123,7 +23293,7 @@
                 <a:tab pos="0" algn="l"/>
               </a:tabLst>
             </a:pPr>
-            <a:fld id="{F1D25FCE-A38E-4ED4-842F-C3B8EC8F2020}" type="slidenum">
+            <a:fld id="{0BE3AD39-84F7-4D72-8353-44B4F27A2D34}" type="slidenum">
               <a:rPr lang="en-IN" sz="900" b="0" u="none" strike="noStrike">
                 <a:solidFill>
                   <a:schemeClr val="accent1"/>
@@ -23132,7 +23302,7 @@
                 <a:uFillTx/>
                 <a:latin typeface="Trebuchet MS"/>
               </a:rPr>
-              <a:t>16</a:t>
+              <a:t>&lt;number&gt;</a:t>
             </a:fld>
             <a:endParaRPr lang="en-US" sz="900" b="0" u="none" strike="noStrike">
               <a:solidFill>
@@ -23198,7 +23368,7 @@
                 <a:uFillTx/>
                 <a:latin typeface="Times New Roman"/>
               </a:rPr>
-              <a:t> </a:t>
+              <a:t>&lt;date/time&gt;</a:t>
             </a:r>
             <a:endParaRPr lang="en-US" sz="1400" b="0" u="none" strike="noStrike">
               <a:solidFill>
@@ -24536,7 +24706,7 @@
                 <a:tab pos="0" algn="l"/>
               </a:tabLst>
             </a:pPr>
-            <a:fld id="{5C94AAB3-1940-4807-80AB-DE4030D1607B}" type="slidenum">
+            <a:fld id="{0E5EA106-BBEE-49B4-A0E1-D07C318E5C00}" type="slidenum">
               <a:rPr lang="en-IN" sz="900" b="0" u="none" strike="noStrike">
                 <a:solidFill>
                   <a:schemeClr val="accent1"/>
@@ -25922,7 +26092,7 @@
                 <a:tab pos="0" algn="l"/>
               </a:tabLst>
             </a:pPr>
-            <a:fld id="{93830071-D0A3-4864-BCFF-61A1E0611C25}" type="slidenum">
+            <a:fld id="{C86148CD-5024-48A8-9C06-518E053624E3}" type="slidenum">
               <a:rPr lang="en-IN" sz="900" b="0" u="none" strike="noStrike">
                 <a:solidFill>
                   <a:schemeClr val="accent1"/>
@@ -26016,6 +26186,7 @@
   <p:sldLayoutIdLst>
     <p:sldLayoutId id="2147483670" r:id="rId2"/>
     <p:sldLayoutId id="2147483671" r:id="rId3"/>
+    <p:sldLayoutId id="2147483672" r:id="rId4"/>
   </p:sldLayoutIdLst>
 </p:sldMaster>
 </file>
@@ -26077,7 +26248,7 @@
       </p:grpSpPr>
       <p:sp>
         <p:nvSpPr>
-          <p:cNvPr id="326" name="PlaceHolder 1"/>
+          <p:cNvPr id="328" name="PlaceHolder 1"/>
           <p:cNvSpPr>
             <a:spLocks noGrp="1"/>
           </p:cNvSpPr>
@@ -26139,7 +26310,7 @@
       </p:sp>
       <p:sp>
         <p:nvSpPr>
-          <p:cNvPr id="327" name="PlaceHolder 2"/>
+          <p:cNvPr id="329" name="PlaceHolder 2"/>
           <p:cNvSpPr/>
           <p:nvPr/>
         </p:nvSpPr>
@@ -26615,7 +26786,7 @@
       </p:grpSpPr>
       <p:sp>
         <p:nvSpPr>
-          <p:cNvPr id="366" name="PlaceHolder 8"/>
+          <p:cNvPr id="368" name="PlaceHolder 8"/>
           <p:cNvSpPr/>
           <p:nvPr/>
         </p:nvSpPr>
@@ -26706,7 +26877,7 @@
       </p:sp>
       <p:sp>
         <p:nvSpPr>
-          <p:cNvPr id="367" name="PlaceHolder 9"/>
+          <p:cNvPr id="369" name="PlaceHolder 9"/>
           <p:cNvSpPr/>
           <p:nvPr/>
         </p:nvSpPr>
@@ -27177,7 +27348,7 @@
       </p:grpSpPr>
       <p:sp>
         <p:nvSpPr>
-          <p:cNvPr id="368" name="PlaceHolder 16"/>
+          <p:cNvPr id="370" name="PlaceHolder 16"/>
           <p:cNvSpPr/>
           <p:nvPr/>
         </p:nvSpPr>
@@ -27244,7 +27415,7 @@
       </p:sp>
       <p:sp>
         <p:nvSpPr>
-          <p:cNvPr id="369" name="PlaceHolder 17"/>
+          <p:cNvPr id="371" name="PlaceHolder 17"/>
           <p:cNvSpPr/>
           <p:nvPr/>
         </p:nvSpPr>
@@ -27715,7 +27886,7 @@
       </p:grpSpPr>
       <p:sp>
         <p:nvSpPr>
-          <p:cNvPr id="370" name="PlaceHolder 14"/>
+          <p:cNvPr id="372" name="PlaceHolder 14"/>
           <p:cNvSpPr/>
           <p:nvPr/>
         </p:nvSpPr>
@@ -27782,7 +27953,7 @@
       </p:sp>
       <p:pic>
         <p:nvPicPr>
-          <p:cNvPr id="371" name=""/>
+          <p:cNvPr id="373" name=""/>
           <p:cNvPicPr/>
           <p:nvPr/>
         </p:nvPicPr>
@@ -27836,7 +28007,7 @@
       </p:grpSpPr>
       <p:sp>
         <p:nvSpPr>
-          <p:cNvPr id="372" name="PlaceHolder 10"/>
+          <p:cNvPr id="374" name="PlaceHolder 10"/>
           <p:cNvSpPr/>
           <p:nvPr/>
         </p:nvSpPr>
@@ -27921,7 +28092,7 @@
       </p:sp>
       <p:sp>
         <p:nvSpPr>
-          <p:cNvPr id="373" name="PlaceHolder 11"/>
+          <p:cNvPr id="375" name="PlaceHolder 11"/>
           <p:cNvSpPr/>
           <p:nvPr/>
         </p:nvSpPr>
@@ -28019,7 +28190,105 @@
                 <a:uFillTx/>
                 <a:latin typeface="Trebuchet MS"/>
               </a:rPr>
-              <a:t>Allow voters to cast their votes securely and anonymously using blockchain technology.</a:t>
+              <a:t>Allow voters </a:t>
+            </a:r>
+            <a:r>
+              <a:rPr lang="en-US" sz="1800" b="0" u="none" strike="noStrike">
+                <a:solidFill>
+                  <a:schemeClr val="dk1">
+                    <a:lumMod val="75000"/>
+                    <a:lumOff val="25000"/>
+                  </a:schemeClr>
+                </a:solidFill>
+                <a:effectLst/>
+                <a:uFillTx/>
+                <a:latin typeface="Trebuchet MS"/>
+              </a:rPr>
+              <a:t>to cast their </a:t>
+            </a:r>
+            <a:r>
+              <a:rPr lang="en-US" sz="1800" b="0" u="none" strike="noStrike">
+                <a:solidFill>
+                  <a:schemeClr val="dk1">
+                    <a:lumMod val="75000"/>
+                    <a:lumOff val="25000"/>
+                  </a:schemeClr>
+                </a:solidFill>
+                <a:effectLst/>
+                <a:uFillTx/>
+                <a:latin typeface="Trebuchet MS"/>
+              </a:rPr>
+              <a:t>votes </a:t>
+            </a:r>
+            <a:r>
+              <a:rPr lang="en-US" sz="1800" b="0" u="none" strike="noStrike">
+                <a:solidFill>
+                  <a:schemeClr val="dk1">
+                    <a:lumMod val="75000"/>
+                    <a:lumOff val="25000"/>
+                  </a:schemeClr>
+                </a:solidFill>
+                <a:effectLst/>
+                <a:uFillTx/>
+                <a:latin typeface="Trebuchet MS"/>
+              </a:rPr>
+              <a:t>securely and </a:t>
+            </a:r>
+            <a:r>
+              <a:rPr lang="en-US" sz="1800" b="0" u="none" strike="noStrike">
+                <a:solidFill>
+                  <a:schemeClr val="dk1">
+                    <a:lumMod val="75000"/>
+                    <a:lumOff val="25000"/>
+                  </a:schemeClr>
+                </a:solidFill>
+                <a:effectLst/>
+                <a:uFillTx/>
+                <a:latin typeface="Trebuchet MS"/>
+              </a:rPr>
+              <a:t>anonymousl</a:t>
+            </a:r>
+            <a:r>
+              <a:rPr lang="en-US" sz="1800" b="0" u="none" strike="noStrike">
+                <a:solidFill>
+                  <a:schemeClr val="dk1">
+                    <a:lumMod val="75000"/>
+                    <a:lumOff val="25000"/>
+                  </a:schemeClr>
+                </a:solidFill>
+                <a:effectLst/>
+                <a:uFillTx/>
+                <a:latin typeface="Trebuchet MS"/>
+              </a:rPr>
+              <a:t>y using </a:t>
+            </a:r>
+            <a:r>
+              <a:rPr lang="en-US" sz="1800" b="0" u="none" strike="noStrike">
+                <a:solidFill>
+                  <a:schemeClr val="dk1">
+                    <a:lumMod val="75000"/>
+                    <a:lumOff val="25000"/>
+                  </a:schemeClr>
+                </a:solidFill>
+                <a:effectLst/>
+                <a:uFillTx/>
+                <a:latin typeface="Trebuchet MS"/>
+              </a:rPr>
+              <a:t>blockchain </a:t>
+            </a:r>
+            <a:r>
+              <a:rPr lang="en-US" sz="1800" b="0" u="none" strike="noStrike">
+                <a:solidFill>
+                  <a:schemeClr val="dk1">
+                    <a:lumMod val="75000"/>
+                    <a:lumOff val="25000"/>
+                  </a:schemeClr>
+                </a:solidFill>
+                <a:effectLst/>
+                <a:uFillTx/>
+                <a:latin typeface="Trebuchet MS"/>
+              </a:rPr>
+              <a:t>technology.</a:t>
             </a:r>
             <a:endParaRPr lang="en-US" sz="1800" b="0" u="none" strike="noStrike">
               <a:solidFill>
@@ -28060,7 +28329,35 @@
                 <a:uFillTx/>
                 <a:latin typeface="Trebuchet MS"/>
               </a:rPr>
-              <a:t>Key Responsibilities</a:t>
+              <a:t>Key </a:t>
+            </a:r>
+            <a:r>
+              <a:rPr lang="en-US" sz="1800" b="0" u="none" strike="noStrike">
+                <a:solidFill>
+                  <a:schemeClr val="dk1">
+                    <a:lumMod val="75000"/>
+                    <a:lumOff val="25000"/>
+                  </a:schemeClr>
+                </a:solidFill>
+                <a:effectLst/>
+                <a:uFillTx/>
+                <a:latin typeface="Trebuchet MS"/>
+              </a:rPr>
+              <a:t>Responsibiliti</a:t>
+            </a:r>
+            <a:r>
+              <a:rPr lang="en-US" sz="1800" b="0" u="none" strike="noStrike">
+                <a:solidFill>
+                  <a:schemeClr val="dk1">
+                    <a:lumMod val="75000"/>
+                    <a:lumOff val="25000"/>
+                  </a:schemeClr>
+                </a:solidFill>
+                <a:effectLst/>
+                <a:uFillTx/>
+                <a:latin typeface="Trebuchet MS"/>
+              </a:rPr>
+              <a:t>es</a:t>
             </a:r>
             <a:endParaRPr lang="en-US" sz="1800" b="0" u="none" strike="noStrike">
               <a:solidFill>
@@ -28101,7 +28398,105 @@
                 <a:uFillTx/>
                 <a:latin typeface="Trebuchet MS"/>
               </a:rPr>
-              <a:t>Display live ballots and candidate/options to authenticated and eligible voters.</a:t>
+              <a:t>Display live </a:t>
+            </a:r>
+            <a:r>
+              <a:rPr lang="en-US" sz="1800" b="0" u="none" strike="noStrike">
+                <a:solidFill>
+                  <a:schemeClr val="dk1">
+                    <a:lumMod val="75000"/>
+                    <a:lumOff val="25000"/>
+                  </a:schemeClr>
+                </a:solidFill>
+                <a:effectLst/>
+                <a:uFillTx/>
+                <a:latin typeface="Trebuchet MS"/>
+              </a:rPr>
+              <a:t>ballots and </a:t>
+            </a:r>
+            <a:r>
+              <a:rPr lang="en-US" sz="1800" b="0" u="none" strike="noStrike">
+                <a:solidFill>
+                  <a:schemeClr val="dk1">
+                    <a:lumMod val="75000"/>
+                    <a:lumOff val="25000"/>
+                  </a:schemeClr>
+                </a:solidFill>
+                <a:effectLst/>
+                <a:uFillTx/>
+                <a:latin typeface="Trebuchet MS"/>
+              </a:rPr>
+              <a:t>candidate/o</a:t>
+            </a:r>
+            <a:r>
+              <a:rPr lang="en-US" sz="1800" b="0" u="none" strike="noStrike">
+                <a:solidFill>
+                  <a:schemeClr val="dk1">
+                    <a:lumMod val="75000"/>
+                    <a:lumOff val="25000"/>
+                  </a:schemeClr>
+                </a:solidFill>
+                <a:effectLst/>
+                <a:uFillTx/>
+                <a:latin typeface="Trebuchet MS"/>
+              </a:rPr>
+              <a:t>ptions to </a:t>
+            </a:r>
+            <a:r>
+              <a:rPr lang="en-US" sz="1800" b="0" u="none" strike="noStrike">
+                <a:solidFill>
+                  <a:schemeClr val="dk1">
+                    <a:lumMod val="75000"/>
+                    <a:lumOff val="25000"/>
+                  </a:schemeClr>
+                </a:solidFill>
+                <a:effectLst/>
+                <a:uFillTx/>
+                <a:latin typeface="Trebuchet MS"/>
+              </a:rPr>
+              <a:t>authenticate</a:t>
+            </a:r>
+            <a:r>
+              <a:rPr lang="en-US" sz="1800" b="0" u="none" strike="noStrike">
+                <a:solidFill>
+                  <a:schemeClr val="dk1">
+                    <a:lumMod val="75000"/>
+                    <a:lumOff val="25000"/>
+                  </a:schemeClr>
+                </a:solidFill>
+                <a:effectLst/>
+                <a:uFillTx/>
+                <a:latin typeface="Trebuchet MS"/>
+              </a:rPr>
+              <a:t>d and </a:t>
+            </a:r>
+            <a:r>
+              <a:rPr lang="en-US" sz="1800" b="0" u="none" strike="noStrike">
+                <a:solidFill>
+                  <a:schemeClr val="dk1">
+                    <a:lumMod val="75000"/>
+                    <a:lumOff val="25000"/>
+                  </a:schemeClr>
+                </a:solidFill>
+                <a:effectLst/>
+                <a:uFillTx/>
+                <a:latin typeface="Trebuchet MS"/>
+              </a:rPr>
+              <a:t>eligible </a:t>
+            </a:r>
+            <a:r>
+              <a:rPr lang="en-US" sz="1800" b="0" u="none" strike="noStrike">
+                <a:solidFill>
+                  <a:schemeClr val="dk1">
+                    <a:lumMod val="75000"/>
+                    <a:lumOff val="25000"/>
+                  </a:schemeClr>
+                </a:solidFill>
+                <a:effectLst/>
+                <a:uFillTx/>
+                <a:latin typeface="Trebuchet MS"/>
+              </a:rPr>
+              <a:t>voters.</a:t>
             </a:r>
             <a:endParaRPr lang="en-US" sz="1800" b="0" u="none" strike="noStrike">
               <a:solidFill>
@@ -28142,7 +28537,77 @@
                 <a:uFillTx/>
                 <a:latin typeface="Trebuchet MS"/>
               </a:rPr>
-              <a:t>Verify voter eligibility before allowing them to vote.</a:t>
+              <a:t>Verify voter </a:t>
+            </a:r>
+            <a:r>
+              <a:rPr lang="en-US" sz="1800" b="0" u="none" strike="noStrike">
+                <a:solidFill>
+                  <a:schemeClr val="dk1">
+                    <a:lumMod val="75000"/>
+                    <a:lumOff val="25000"/>
+                  </a:schemeClr>
+                </a:solidFill>
+                <a:effectLst/>
+                <a:uFillTx/>
+                <a:latin typeface="Trebuchet MS"/>
+              </a:rPr>
+              <a:t>eligibility </a:t>
+            </a:r>
+            <a:r>
+              <a:rPr lang="en-US" sz="1800" b="0" u="none" strike="noStrike">
+                <a:solidFill>
+                  <a:schemeClr val="dk1">
+                    <a:lumMod val="75000"/>
+                    <a:lumOff val="25000"/>
+                  </a:schemeClr>
+                </a:solidFill>
+                <a:effectLst/>
+                <a:uFillTx/>
+                <a:latin typeface="Trebuchet MS"/>
+              </a:rPr>
+              <a:t>before </a:t>
+            </a:r>
+            <a:r>
+              <a:rPr lang="en-US" sz="1800" b="0" u="none" strike="noStrike">
+                <a:solidFill>
+                  <a:schemeClr val="dk1">
+                    <a:lumMod val="75000"/>
+                    <a:lumOff val="25000"/>
+                  </a:schemeClr>
+                </a:solidFill>
+                <a:effectLst/>
+                <a:uFillTx/>
+                <a:latin typeface="Trebuchet MS"/>
+              </a:rPr>
+              <a:t>allowing </a:t>
+            </a:r>
+            <a:r>
+              <a:rPr lang="en-US" sz="1800" b="0" u="none" strike="noStrike">
+                <a:solidFill>
+                  <a:schemeClr val="dk1">
+                    <a:lumMod val="75000"/>
+                    <a:lumOff val="25000"/>
+                  </a:schemeClr>
+                </a:solidFill>
+                <a:effectLst/>
+                <a:uFillTx/>
+                <a:latin typeface="Trebuchet MS"/>
+              </a:rPr>
+              <a:t>them to </a:t>
+            </a:r>
+            <a:r>
+              <a:rPr lang="en-US" sz="1800" b="0" u="none" strike="noStrike">
+                <a:solidFill>
+                  <a:schemeClr val="dk1">
+                    <a:lumMod val="75000"/>
+                    <a:lumOff val="25000"/>
+                  </a:schemeClr>
+                </a:solidFill>
+                <a:effectLst/>
+                <a:uFillTx/>
+                <a:latin typeface="Trebuchet MS"/>
+              </a:rPr>
+              <a:t>vote.</a:t>
             </a:r>
             <a:endParaRPr lang="en-US" sz="1800" b="0" u="none" strike="noStrike">
               <a:solidFill>
@@ -28183,7 +28648,91 @@
                 <a:uFillTx/>
                 <a:latin typeface="Trebuchet MS"/>
               </a:rPr>
-              <a:t>Enforce the “one person, one vote” rule to prevent duplicate voting.</a:t>
+              <a:t>Enforce the </a:t>
+            </a:r>
+            <a:r>
+              <a:rPr lang="en-US" sz="1800" b="0" u="none" strike="noStrike">
+                <a:solidFill>
+                  <a:schemeClr val="dk1">
+                    <a:lumMod val="75000"/>
+                    <a:lumOff val="25000"/>
+                  </a:schemeClr>
+                </a:solidFill>
+                <a:effectLst/>
+                <a:uFillTx/>
+                <a:latin typeface="Trebuchet MS"/>
+              </a:rPr>
+              <a:t>“one person, </a:t>
+            </a:r>
+            <a:r>
+              <a:rPr lang="en-US" sz="1800" b="0" u="none" strike="noStrike">
+                <a:solidFill>
+                  <a:schemeClr val="dk1">
+                    <a:lumMod val="75000"/>
+                    <a:lumOff val="25000"/>
+                  </a:schemeClr>
+                </a:solidFill>
+                <a:effectLst/>
+                <a:uFillTx/>
+                <a:latin typeface="Trebuchet MS"/>
+              </a:rPr>
+              <a:t>one vote” </a:t>
+            </a:r>
+            <a:r>
+              <a:rPr lang="en-US" sz="1800" b="0" u="none" strike="noStrike">
+                <a:solidFill>
+                  <a:schemeClr val="dk1">
+                    <a:lumMod val="75000"/>
+                    <a:lumOff val="25000"/>
+                  </a:schemeClr>
+                </a:solidFill>
+                <a:effectLst/>
+                <a:uFillTx/>
+                <a:latin typeface="Trebuchet MS"/>
+              </a:rPr>
+              <a:t>rule to </a:t>
+            </a:r>
+            <a:r>
+              <a:rPr lang="en-US" sz="1800" b="0" u="none" strike="noStrike">
+                <a:solidFill>
+                  <a:schemeClr val="dk1">
+                    <a:lumMod val="75000"/>
+                    <a:lumOff val="25000"/>
+                  </a:schemeClr>
+                </a:solidFill>
+                <a:effectLst/>
+                <a:uFillTx/>
+                <a:latin typeface="Trebuchet MS"/>
+              </a:rPr>
+              <a:t>prevent </a:t>
+            </a:r>
+            <a:r>
+              <a:rPr lang="en-US" sz="1800" b="0" u="none" strike="noStrike">
+                <a:solidFill>
+                  <a:schemeClr val="dk1">
+                    <a:lumMod val="75000"/>
+                    <a:lumOff val="25000"/>
+                  </a:schemeClr>
+                </a:solidFill>
+                <a:effectLst/>
+                <a:uFillTx/>
+                <a:latin typeface="Trebuchet MS"/>
+              </a:rPr>
+              <a:t>duplicate </a:t>
+            </a:r>
+            <a:r>
+              <a:rPr lang="en-US" sz="1800" b="0" u="none" strike="noStrike">
+                <a:solidFill>
+                  <a:schemeClr val="dk1">
+                    <a:lumMod val="75000"/>
+                    <a:lumOff val="25000"/>
+                  </a:schemeClr>
+                </a:solidFill>
+                <a:effectLst/>
+                <a:uFillTx/>
+                <a:latin typeface="Trebuchet MS"/>
+              </a:rPr>
+              <a:t>voting.</a:t>
             </a:r>
             <a:endParaRPr lang="en-US" sz="1800" b="0" u="none" strike="noStrike">
               <a:solidFill>
@@ -28224,7 +28773,105 @@
                 <a:uFillTx/>
                 <a:latin typeface="Trebuchet MS"/>
               </a:rPr>
-              <a:t>Submit each vote as a blockchain transaction ensuring transparency and integrity.</a:t>
+              <a:t>Submit each </a:t>
+            </a:r>
+            <a:r>
+              <a:rPr lang="en-US" sz="1800" b="0" u="none" strike="noStrike">
+                <a:solidFill>
+                  <a:schemeClr val="dk1">
+                    <a:lumMod val="75000"/>
+                    <a:lumOff val="25000"/>
+                  </a:schemeClr>
+                </a:solidFill>
+                <a:effectLst/>
+                <a:uFillTx/>
+                <a:latin typeface="Trebuchet MS"/>
+              </a:rPr>
+              <a:t>vote as a </a:t>
+            </a:r>
+            <a:r>
+              <a:rPr lang="en-US" sz="1800" b="0" u="none" strike="noStrike">
+                <a:solidFill>
+                  <a:schemeClr val="dk1">
+                    <a:lumMod val="75000"/>
+                    <a:lumOff val="25000"/>
+                  </a:schemeClr>
+                </a:solidFill>
+                <a:effectLst/>
+                <a:uFillTx/>
+                <a:latin typeface="Trebuchet MS"/>
+              </a:rPr>
+              <a:t>blockchain </a:t>
+            </a:r>
+            <a:r>
+              <a:rPr lang="en-US" sz="1800" b="0" u="none" strike="noStrike">
+                <a:solidFill>
+                  <a:schemeClr val="dk1">
+                    <a:lumMod val="75000"/>
+                    <a:lumOff val="25000"/>
+                  </a:schemeClr>
+                </a:solidFill>
+                <a:effectLst/>
+                <a:uFillTx/>
+                <a:latin typeface="Trebuchet MS"/>
+              </a:rPr>
+              <a:t>transaction </a:t>
+            </a:r>
+            <a:r>
+              <a:rPr lang="en-US" sz="1800" b="0" u="none" strike="noStrike">
+                <a:solidFill>
+                  <a:schemeClr val="dk1">
+                    <a:lumMod val="75000"/>
+                    <a:lumOff val="25000"/>
+                  </a:schemeClr>
+                </a:solidFill>
+                <a:effectLst/>
+                <a:uFillTx/>
+                <a:latin typeface="Trebuchet MS"/>
+              </a:rPr>
+              <a:t>ensuring </a:t>
+            </a:r>
+            <a:r>
+              <a:rPr lang="en-US" sz="1800" b="0" u="none" strike="noStrike">
+                <a:solidFill>
+                  <a:schemeClr val="dk1">
+                    <a:lumMod val="75000"/>
+                    <a:lumOff val="25000"/>
+                  </a:schemeClr>
+                </a:solidFill>
+                <a:effectLst/>
+                <a:uFillTx/>
+                <a:latin typeface="Trebuchet MS"/>
+              </a:rPr>
+              <a:t>transparenc</a:t>
+            </a:r>
+            <a:r>
+              <a:rPr lang="en-US" sz="1800" b="0" u="none" strike="noStrike">
+                <a:solidFill>
+                  <a:schemeClr val="dk1">
+                    <a:lumMod val="75000"/>
+                    <a:lumOff val="25000"/>
+                  </a:schemeClr>
+                </a:solidFill>
+                <a:effectLst/>
+                <a:uFillTx/>
+                <a:latin typeface="Trebuchet MS"/>
+              </a:rPr>
+              <a:t>y and </a:t>
+            </a:r>
+            <a:r>
+              <a:rPr lang="en-US" sz="1800" b="0" u="none" strike="noStrike">
+                <a:solidFill>
+                  <a:schemeClr val="dk1">
+                    <a:lumMod val="75000"/>
+                    <a:lumOff val="25000"/>
+                  </a:schemeClr>
+                </a:solidFill>
+                <a:effectLst/>
+                <a:uFillTx/>
+                <a:latin typeface="Trebuchet MS"/>
+              </a:rPr>
+              <a:t>integrity.</a:t>
             </a:r>
             <a:endParaRPr lang="en-US" sz="1800" b="0" u="none" strike="noStrike">
               <a:solidFill>
@@ -28306,7 +28953,63 @@
                 <a:uFillTx/>
                 <a:latin typeface="Trebuchet MS"/>
               </a:rPr>
-              <a:t>Secure and tamper-resistant voting process.</a:t>
+              <a:t>Secure and </a:t>
+            </a:r>
+            <a:r>
+              <a:rPr lang="en-US" sz="1800" b="0" u="none" strike="noStrike">
+                <a:solidFill>
+                  <a:schemeClr val="dk1">
+                    <a:lumMod val="75000"/>
+                    <a:lumOff val="25000"/>
+                  </a:schemeClr>
+                </a:solidFill>
+                <a:effectLst/>
+                <a:uFillTx/>
+                <a:latin typeface="Trebuchet MS"/>
+              </a:rPr>
+              <a:t>tamper-</a:t>
+            </a:r>
+            <a:r>
+              <a:rPr lang="en-US" sz="1800" b="0" u="none" strike="noStrike">
+                <a:solidFill>
+                  <a:schemeClr val="dk1">
+                    <a:lumMod val="75000"/>
+                    <a:lumOff val="25000"/>
+                  </a:schemeClr>
+                </a:solidFill>
+                <a:effectLst/>
+                <a:uFillTx/>
+                <a:latin typeface="Trebuchet MS"/>
+              </a:rPr>
+              <a:t>resistant </a:t>
+            </a:r>
+            <a:r>
+              <a:rPr lang="en-US" sz="1800" b="0" u="none" strike="noStrike">
+                <a:solidFill>
+                  <a:schemeClr val="dk1">
+                    <a:lumMod val="75000"/>
+                    <a:lumOff val="25000"/>
+                  </a:schemeClr>
+                </a:solidFill>
+                <a:effectLst/>
+                <a:uFillTx/>
+                <a:latin typeface="Trebuchet MS"/>
+              </a:rPr>
+              <a:t>voting </a:t>
+            </a:r>
+            <a:r>
+              <a:rPr lang="en-US" sz="1800" b="0" u="none" strike="noStrike">
+                <a:solidFill>
+                  <a:schemeClr val="dk1">
+                    <a:lumMod val="75000"/>
+                    <a:lumOff val="25000"/>
+                  </a:schemeClr>
+                </a:solidFill>
+                <a:effectLst/>
+                <a:uFillTx/>
+                <a:latin typeface="Trebuchet MS"/>
+              </a:rPr>
+              <a:t>process.</a:t>
             </a:r>
             <a:endParaRPr lang="en-US" sz="1800" b="0" u="none" strike="noStrike">
               <a:solidFill>
@@ -28347,7 +29050,77 @@
                 <a:uFillTx/>
                 <a:latin typeface="Trebuchet MS"/>
               </a:rPr>
-              <a:t>Ensures privacy and authenticity of voter participation.</a:t>
+              <a:t>Ensures </a:t>
+            </a:r>
+            <a:r>
+              <a:rPr lang="en-US" sz="1800" b="0" u="none" strike="noStrike">
+                <a:solidFill>
+                  <a:schemeClr val="dk1">
+                    <a:lumMod val="75000"/>
+                    <a:lumOff val="25000"/>
+                  </a:schemeClr>
+                </a:solidFill>
+                <a:effectLst/>
+                <a:uFillTx/>
+                <a:latin typeface="Trebuchet MS"/>
+              </a:rPr>
+              <a:t>privacy and </a:t>
+            </a:r>
+            <a:r>
+              <a:rPr lang="en-US" sz="1800" b="0" u="none" strike="noStrike">
+                <a:solidFill>
+                  <a:schemeClr val="dk1">
+                    <a:lumMod val="75000"/>
+                    <a:lumOff val="25000"/>
+                  </a:schemeClr>
+                </a:solidFill>
+                <a:effectLst/>
+                <a:uFillTx/>
+                <a:latin typeface="Trebuchet MS"/>
+              </a:rPr>
+              <a:t>authenticity </a:t>
+            </a:r>
+            <a:r>
+              <a:rPr lang="en-US" sz="1800" b="0" u="none" strike="noStrike">
+                <a:solidFill>
+                  <a:schemeClr val="dk1">
+                    <a:lumMod val="75000"/>
+                    <a:lumOff val="25000"/>
+                  </a:schemeClr>
+                </a:solidFill>
+                <a:effectLst/>
+                <a:uFillTx/>
+                <a:latin typeface="Trebuchet MS"/>
+              </a:rPr>
+              <a:t>of voter </a:t>
+            </a:r>
+            <a:r>
+              <a:rPr lang="en-US" sz="1800" b="0" u="none" strike="noStrike">
+                <a:solidFill>
+                  <a:schemeClr val="dk1">
+                    <a:lumMod val="75000"/>
+                    <a:lumOff val="25000"/>
+                  </a:schemeClr>
+                </a:solidFill>
+                <a:effectLst/>
+                <a:uFillTx/>
+                <a:latin typeface="Trebuchet MS"/>
+              </a:rPr>
+              <a:t>participation</a:t>
+            </a:r>
+            <a:r>
+              <a:rPr lang="en-US" sz="1800" b="0" u="none" strike="noStrike">
+                <a:solidFill>
+                  <a:schemeClr val="dk1">
+                    <a:lumMod val="75000"/>
+                    <a:lumOff val="25000"/>
+                  </a:schemeClr>
+                </a:solidFill>
+                <a:effectLst/>
+                <a:uFillTx/>
+                <a:latin typeface="Trebuchet MS"/>
+              </a:rPr>
+              <a:t>.</a:t>
             </a:r>
             <a:r>
               <a:rPr lang="en-US" sz="1800" b="0" u="none" strike="noStrike">
@@ -28406,7 +29179,7 @@
       </p:grpSpPr>
       <p:sp>
         <p:nvSpPr>
-          <p:cNvPr id="374" name="PlaceHolder 18"/>
+          <p:cNvPr id="376" name="PlaceHolder 18"/>
           <p:cNvSpPr/>
           <p:nvPr/>
         </p:nvSpPr>
@@ -28467,7 +29240,7 @@
       </p:sp>
       <p:sp>
         <p:nvSpPr>
-          <p:cNvPr id="375" name="PlaceHolder 19"/>
+          <p:cNvPr id="377" name="PlaceHolder 19"/>
           <p:cNvSpPr/>
           <p:nvPr/>
         </p:nvSpPr>
@@ -28938,7 +29711,7 @@
       </p:grpSpPr>
       <p:sp>
         <p:nvSpPr>
-          <p:cNvPr id="376" name="PlaceHolder 15"/>
+          <p:cNvPr id="378" name="PlaceHolder 15"/>
           <p:cNvSpPr/>
           <p:nvPr/>
         </p:nvSpPr>
@@ -28999,7 +29772,7 @@
       </p:sp>
       <p:pic>
         <p:nvPicPr>
-          <p:cNvPr id="377" name=""/>
+          <p:cNvPr id="379" name=""/>
           <p:cNvPicPr/>
           <p:nvPr/>
         </p:nvPicPr>
@@ -29053,7 +29826,7 @@
       </p:grpSpPr>
       <p:sp>
         <p:nvSpPr>
-          <p:cNvPr id="378" name="PlaceHolder 1"/>
+          <p:cNvPr id="380" name="PlaceHolder 1"/>
           <p:cNvSpPr>
             <a:spLocks noGrp="1"/>
           </p:cNvSpPr>
@@ -29112,7 +29885,7 @@
       </p:sp>
       <p:sp>
         <p:nvSpPr>
-          <p:cNvPr id="379" name="Cloud Callout 3"/>
+          <p:cNvPr id="381" name="Cloud Callout 3"/>
           <p:cNvSpPr/>
           <p:nvPr/>
         </p:nvSpPr>
@@ -29188,7 +29961,7 @@
       </p:sp>
       <p:sp>
         <p:nvSpPr>
-          <p:cNvPr id="380" name="PlaceHolder 12"/>
+          <p:cNvPr id="382" name="PlaceHolder 12"/>
           <p:cNvSpPr/>
           <p:nvPr/>
         </p:nvSpPr>
@@ -29495,7 +30268,7 @@
       </p:grpSpPr>
       <p:sp>
         <p:nvSpPr>
-          <p:cNvPr id="328" name="PlaceHolder 1"/>
+          <p:cNvPr id="330" name="PlaceHolder 1"/>
           <p:cNvSpPr>
             <a:spLocks noGrp="1"/>
           </p:cNvSpPr>
@@ -29554,7 +30327,7 @@
       </p:sp>
       <p:sp>
         <p:nvSpPr>
-          <p:cNvPr id="329" name="PlaceHolder 1"/>
+          <p:cNvPr id="331" name="PlaceHolder 1"/>
           <p:cNvSpPr/>
           <p:nvPr/>
         </p:nvSpPr>
@@ -29861,7 +30634,7 @@
       </p:grpSpPr>
       <p:sp>
         <p:nvSpPr>
-          <p:cNvPr id="330" name="PlaceHolder 1"/>
+          <p:cNvPr id="332" name="PlaceHolder 1"/>
           <p:cNvSpPr>
             <a:spLocks noGrp="1"/>
           </p:cNvSpPr>
@@ -29920,7 +30693,7 @@
       </p:sp>
       <p:sp>
         <p:nvSpPr>
-          <p:cNvPr id="331" name="PlaceHolder 3"/>
+          <p:cNvPr id="333" name="PlaceHolder 3"/>
           <p:cNvSpPr/>
           <p:nvPr/>
         </p:nvSpPr>
@@ -30227,7 +31000,7 @@
       </p:grpSpPr>
       <p:sp>
         <p:nvSpPr>
-          <p:cNvPr id="332" name="PlaceHolder 1"/>
+          <p:cNvPr id="334" name="PlaceHolder 1"/>
           <p:cNvSpPr>
             <a:spLocks noGrp="1"/>
           </p:cNvSpPr>
@@ -30286,7 +31059,7 @@
       </p:sp>
       <p:sp>
         <p:nvSpPr>
-          <p:cNvPr id="333" name="Rectangle 3"/>
+          <p:cNvPr id="335" name="Rectangle 3"/>
           <p:cNvSpPr/>
           <p:nvPr/>
         </p:nvSpPr>
@@ -30343,7 +31116,7 @@
       </p:sp>
       <p:sp>
         <p:nvSpPr>
-          <p:cNvPr id="334" name="PlaceHolder 4"/>
+          <p:cNvPr id="336" name="PlaceHolder 4"/>
           <p:cNvSpPr/>
           <p:nvPr/>
         </p:nvSpPr>
@@ -30579,7 +31352,7 @@
       </p:sp>
       <p:sp>
         <p:nvSpPr>
-          <p:cNvPr id="335" name="Content Placeholder 1"/>
+          <p:cNvPr id="337" name="Content Placeholder 1"/>
           <p:cNvSpPr/>
           <p:nvPr/>
         </p:nvSpPr>
@@ -30845,7 +31618,7 @@
       </p:grpSpPr>
       <p:sp>
         <p:nvSpPr>
-          <p:cNvPr id="336" name="PlaceHolder 1"/>
+          <p:cNvPr id="338" name="PlaceHolder 1"/>
           <p:cNvSpPr>
             <a:spLocks noGrp="1"/>
           </p:cNvSpPr>
@@ -30904,7 +31677,7 @@
       </p:sp>
       <p:sp>
         <p:nvSpPr>
-          <p:cNvPr id="337" name="Rectangle 4"/>
+          <p:cNvPr id="339" name="Rectangle 4"/>
           <p:cNvSpPr/>
           <p:nvPr/>
         </p:nvSpPr>
@@ -30961,7 +31734,7 @@
       </p:sp>
       <p:sp>
         <p:nvSpPr>
-          <p:cNvPr id="338" name="PlaceHolder 5"/>
+          <p:cNvPr id="340" name="PlaceHolder 5"/>
           <p:cNvSpPr/>
           <p:nvPr/>
         </p:nvSpPr>
@@ -31197,7 +31970,7 @@
       </p:sp>
       <p:sp>
         <p:nvSpPr>
-          <p:cNvPr id="339" name="Content Placeholder 3"/>
+          <p:cNvPr id="341" name="Content Placeholder 3"/>
           <p:cNvSpPr/>
           <p:nvPr/>
         </p:nvSpPr>
@@ -31463,7 +32236,7 @@
       </p:grpSpPr>
       <p:sp>
         <p:nvSpPr>
-          <p:cNvPr id="340" name="PlaceHolder 1"/>
+          <p:cNvPr id="342" name="PlaceHolder 1"/>
           <p:cNvSpPr>
             <a:spLocks noGrp="1"/>
           </p:cNvSpPr>
@@ -31522,7 +32295,7 @@
       </p:sp>
       <p:sp>
         <p:nvSpPr>
-          <p:cNvPr id="341" name=""/>
+          <p:cNvPr id="343" name=""/>
           <p:cNvSpPr/>
           <p:nvPr/>
         </p:nvSpPr>
@@ -31585,7 +32358,7 @@
       </p:sp>
       <p:sp>
         <p:nvSpPr>
-          <p:cNvPr id="342" name=""/>
+          <p:cNvPr id="344" name=""/>
           <p:cNvSpPr/>
           <p:nvPr/>
         </p:nvSpPr>
@@ -31648,7 +32421,7 @@
       </p:sp>
       <p:sp>
         <p:nvSpPr>
-          <p:cNvPr id="343" name=""/>
+          <p:cNvPr id="345" name=""/>
           <p:cNvSpPr/>
           <p:nvPr/>
         </p:nvSpPr>
@@ -31711,7 +32484,7 @@
       </p:sp>
       <p:sp>
         <p:nvSpPr>
-          <p:cNvPr id="344" name=""/>
+          <p:cNvPr id="346" name=""/>
           <p:cNvSpPr/>
           <p:nvPr/>
         </p:nvSpPr>
@@ -31774,7 +32547,7 @@
       </p:sp>
       <p:sp>
         <p:nvSpPr>
-          <p:cNvPr id="345" name=""/>
+          <p:cNvPr id="347" name=""/>
           <p:cNvSpPr/>
           <p:nvPr/>
         </p:nvSpPr>
@@ -31837,7 +32610,7 @@
       </p:sp>
       <p:sp>
         <p:nvSpPr>
-          <p:cNvPr id="346" name=""/>
+          <p:cNvPr id="348" name=""/>
           <p:cNvSpPr/>
           <p:nvPr/>
         </p:nvSpPr>
@@ -31900,7 +32673,7 @@
       </p:sp>
       <p:sp>
         <p:nvSpPr>
-          <p:cNvPr id="347" name=""/>
+          <p:cNvPr id="349" name=""/>
           <p:cNvSpPr/>
           <p:nvPr/>
         </p:nvSpPr>
@@ -31943,7 +32716,7 @@
       </p:sp>
       <p:sp>
         <p:nvSpPr>
-          <p:cNvPr id="348" name=""/>
+          <p:cNvPr id="350" name=""/>
           <p:cNvSpPr/>
           <p:nvPr/>
         </p:nvSpPr>
@@ -31986,7 +32759,7 @@
       </p:sp>
       <p:sp>
         <p:nvSpPr>
-          <p:cNvPr id="349" name=""/>
+          <p:cNvPr id="351" name=""/>
           <p:cNvSpPr/>
           <p:nvPr/>
         </p:nvSpPr>
@@ -32029,7 +32802,7 @@
       </p:sp>
       <p:sp>
         <p:nvSpPr>
-          <p:cNvPr id="350" name=""/>
+          <p:cNvPr id="352" name=""/>
           <p:cNvSpPr/>
           <p:nvPr/>
         </p:nvSpPr>
@@ -32072,7 +32845,7 @@
       </p:sp>
       <p:sp>
         <p:nvSpPr>
-          <p:cNvPr id="351" name=""/>
+          <p:cNvPr id="353" name=""/>
           <p:cNvSpPr/>
           <p:nvPr/>
         </p:nvSpPr>
@@ -32115,7 +32888,7 @@
       </p:sp>
       <p:sp>
         <p:nvSpPr>
-          <p:cNvPr id="352" name=""/>
+          <p:cNvPr id="354" name=""/>
           <p:cNvSpPr/>
           <p:nvPr/>
         </p:nvSpPr>
@@ -32158,7 +32931,7 @@
       </p:sp>
       <p:sp>
         <p:nvSpPr>
-          <p:cNvPr id="353" name=""/>
+          <p:cNvPr id="355" name=""/>
           <p:cNvSpPr/>
           <p:nvPr/>
         </p:nvSpPr>
@@ -32201,7 +32974,7 @@
       </p:sp>
       <p:sp>
         <p:nvSpPr>
-          <p:cNvPr id="354" name=""/>
+          <p:cNvPr id="356" name=""/>
           <p:cNvSpPr/>
           <p:nvPr/>
         </p:nvSpPr>
@@ -32264,7 +33037,7 @@
       </p:sp>
       <p:sp>
         <p:nvSpPr>
-          <p:cNvPr id="355" name=""/>
+          <p:cNvPr id="357" name=""/>
           <p:cNvSpPr/>
           <p:nvPr/>
         </p:nvSpPr>
@@ -32325,7 +33098,7 @@
       </p:sp>
       <p:sp>
         <p:nvSpPr>
-          <p:cNvPr id="356" name=""/>
+          <p:cNvPr id="358" name=""/>
           <p:cNvSpPr/>
           <p:nvPr/>
         </p:nvSpPr>
@@ -32382,7 +33155,7 @@
       </p:sp>
       <p:sp>
         <p:nvSpPr>
-          <p:cNvPr id="357" name=""/>
+          <p:cNvPr id="359" name=""/>
           <p:cNvSpPr/>
           <p:nvPr/>
         </p:nvSpPr>
@@ -32469,7 +33242,7 @@
       </p:grpSpPr>
       <p:sp>
         <p:nvSpPr>
-          <p:cNvPr id="358" name="PlaceHolder 1"/>
+          <p:cNvPr id="360" name="PlaceHolder 1"/>
           <p:cNvSpPr>
             <a:spLocks noGrp="1"/>
           </p:cNvSpPr>
@@ -32528,7 +33301,7 @@
       </p:sp>
       <p:sp>
         <p:nvSpPr>
-          <p:cNvPr id="359" name="PlaceHolder 2"/>
+          <p:cNvPr id="361" name="PlaceHolder 2"/>
           <p:cNvSpPr>
             <a:spLocks noGrp="1"/>
           </p:cNvSpPr>
@@ -32612,7 +33385,7 @@
       </p:sp>
       <p:sp>
         <p:nvSpPr>
-          <p:cNvPr id="360" name="Rectangle 4"/>
+          <p:cNvPr id="362" name="Rectangle 4"/>
           <p:cNvSpPr/>
           <p:nvPr/>
         </p:nvSpPr>
@@ -32669,7 +33442,7 @@
       </p:sp>
       <p:sp>
         <p:nvSpPr>
-          <p:cNvPr id="361" name="Content Placeholder 5"/>
+          <p:cNvPr id="363" name="Content Placeholder 5"/>
           <p:cNvSpPr/>
           <p:nvPr/>
         </p:nvSpPr>
@@ -32935,7 +33708,7 @@
       </p:grpSpPr>
       <p:sp>
         <p:nvSpPr>
-          <p:cNvPr id="362" name="PlaceHolder 6"/>
+          <p:cNvPr id="364" name="PlaceHolder 6"/>
           <p:cNvSpPr/>
           <p:nvPr/>
         </p:nvSpPr>
@@ -33014,7 +33787,7 @@
       </p:sp>
       <p:sp>
         <p:nvSpPr>
-          <p:cNvPr id="363" name="PlaceHolder 7"/>
+          <p:cNvPr id="365" name="PlaceHolder 7"/>
           <p:cNvSpPr/>
           <p:nvPr/>
         </p:nvSpPr>
@@ -33581,7 +34354,7 @@
       </p:grpSpPr>
       <p:sp>
         <p:nvSpPr>
-          <p:cNvPr id="364" name="PlaceHolder 13"/>
+          <p:cNvPr id="366" name="PlaceHolder 13"/>
           <p:cNvSpPr/>
           <p:nvPr/>
         </p:nvSpPr>
@@ -33666,7 +34439,7 @@
       </p:sp>
       <p:pic>
         <p:nvPicPr>
-          <p:cNvPr id="365" name=""/>
+          <p:cNvPr id="367" name=""/>
           <p:cNvPicPr/>
           <p:nvPr/>
         </p:nvPicPr>
